--- a/static/downloads/income-streams/SuperAdPro-4-Income-Streams-TH.pptx
+++ b/static/downloads/income-streams/SuperAdPro-4-Income-Streams-TH.pptx
@@ -506,7 +506,7 @@
           <a:p>
             <a:r>
               <a:rPr lang="en-US" dirty="0"/>
-              <a:t>4 Income Streams - SuperAdPro (ภาษาไทย)</a:t>
+              <a:t>4 Income Streams - ภาษาไทย</a:t>
             </a:r>
             <a:endParaRPr lang="en-US" dirty="0"/>
           </a:p>
@@ -594,7 +594,7 @@
           <a:p>
             <a:r>
               <a:rPr lang="en-US" dirty="0"/>
-              <a:t>Membership Referrals - SuperAdPro (ภาษาไทย)</a:t>
+              <a:t>Membership Referrals - ภาษาไทย</a:t>
             </a:r>
             <a:endParaRPr lang="en-US" dirty="0"/>
           </a:p>
@@ -682,7 +682,7 @@
           <a:p>
             <a:r>
               <a:rPr lang="en-US" dirty="0"/>
-              <a:t>Campaign Grid - SuperAdPro (ภาษาไทย)</a:t>
+              <a:t>Campaign Grid - ภาษาไทย</a:t>
             </a:r>
             <a:endParaRPr lang="en-US" dirty="0"/>
           </a:p>
@@ -770,7 +770,7 @@
           <a:p>
             <a:r>
               <a:rPr lang="en-US" dirty="0"/>
-              <a:t>Credit Nexus - SuperAdPro (ภาษาไทย)</a:t>
+              <a:t>Credit Nexus - ภาษาไทย</a:t>
             </a:r>
             <a:endParaRPr lang="en-US" dirty="0"/>
           </a:p>
@@ -858,7 +858,7 @@
           <a:p>
             <a:r>
               <a:rPr lang="en-US" dirty="0"/>
-              <a:t>Course Academy - SuperAdPro (ภาษาไทย)</a:t>
+              <a:t>Course Academy - ภาษาไทย</a:t>
             </a:r>
             <a:endParaRPr lang="en-US" dirty="0"/>
           </a:p>

--- a/static/downloads/income-streams/SuperAdPro-4-Income-Streams-TH.pptx
+++ b/static/downloads/income-streams/SuperAdPro-4-Income-Streams-TH.pptx
@@ -2293,7 +2293,7 @@
                 <a:ea typeface="Arial" pitchFamily="34" charset="-122"/>
                 <a:cs typeface="Arial" pitchFamily="34" charset="-120"/>
               </a:rPr>
-              <a:t>สูงสุด $103,976</a:t>
+              <a:t>สูงสุดทางทฤษฎี: $103,976*</a:t>
             </a:r>
             <a:endParaRPr lang="en-US" sz="850" dirty="0"/>
           </a:p>
@@ -2483,7 +2483,7 @@
                 <a:ea typeface="Arial" pitchFamily="34" charset="-122"/>
                 <a:cs typeface="Arial" pitchFamily="34" charset="-120"/>
               </a:rPr>
-              <a:t>ไม่จำกัด</a:t>
+              <a:t>ผันแปร</a:t>
             </a:r>
             <a:endParaRPr lang="en-US" sz="850" dirty="0"/>
           </a:p>
@@ -6709,7 +6709,7 @@
                 <a:ea typeface="Arial" pitchFamily="34" charset="-122"/>
                 <a:cs typeface="Arial" pitchFamily="34" charset="-120"/>
               </a:rPr>
-              <a:t>เติมครบ 64 ตำแหน่ง ได้โบนัส กริดรีเซ็ต — รายได้ซ้ำไม่จำกัด</a:t>
+              <a:t>เติมครบ 64 ตำแหน่ง ได้โบนัส กริดรีเซ็ต — รายได้ซ้ำขณะที่สมาชิกยังใช้งานอยู่</a:t>
             </a:r>
             <a:endParaRPr lang="en-US" sz="850" dirty="0"/>
           </a:p>
@@ -6775,7 +6775,7 @@
                 <a:ea typeface="Arial" pitchFamily="34" charset="-122"/>
                 <a:cs typeface="Arial" pitchFamily="34" charset="-120"/>
               </a:rPr>
-              <a:t>สูงสุด $103,976</a:t>
+              <a:t>สูงสุดทางทฤษฎี: $103,976*</a:t>
             </a:r>
             <a:pPr algn="ctr" indent="0" marL="0">
               <a:buNone/>
@@ -13159,7 +13159,7 @@
                 <a:ea typeface="Arial" pitchFamily="34" charset="-122"/>
                 <a:cs typeface="Arial" pitchFamily="34" charset="-120"/>
               </a:rPr>
-              <a:t>ไม่จำกัด</a:t>
+              <a:t>ผันแปร</a:t>
             </a:r>
             <a:pPr algn="ctr" indent="0" marL="0">
               <a:buNone/>
